--- a/assets/powerpoints/module-n2-bonjour/A2-la-voix-monte-la-voix-descend.pptx
+++ b/assets/powerpoints/module-n2-bonjour/A2-la-voix-monte-la-voix-descend.pptx
@@ -12539,7 +12539,25 @@
                 </a:solidFill>
                 <a:latin typeface="Verdana"/>
               </a:rPr>
-              <a:t>Une question dite avec la voix qui descend ne s'entend pas comme une question : la personne croit que vous répondez, et elle ne dit plus rien. Montez bien sur la dernière syllabe : ça &lt;b&gt;va&lt;/b&gt; ?</a:t>
+              <a:t>Une question dite avec la voix qui descend ne s'entend pas comme une question : la personne croit que vous répondez, et elle ne dit plus rien. Montez bien sur la dernière syllabe : ça </a:t>
+            </a:r>
+            <a:r>
+              <a:rPr sz="2000" b="1" i="0">
+                <a:solidFill>
+                  <a:srgbClr val="4B4F52"/>
+                </a:solidFill>
+                <a:latin typeface="Verdana"/>
+              </a:rPr>
+              <a:t>va</a:t>
+            </a:r>
+            <a:r>
+              <a:rPr sz="2000" b="0" i="0">
+                <a:solidFill>
+                  <a:srgbClr val="4B4F52"/>
+                </a:solidFill>
+                <a:latin typeface="Verdana"/>
+              </a:rPr>
+              <a:t> ?</a:t>
             </a:r>
           </a:p>
         </p:txBody>
